--- a/Especializacion/Proyecto I/Clases/Sesion 04 - Retroalimentación ACA1 · Antecedentes de investigación/Presentacion.pptx
+++ b/Especializacion/Proyecto I/Clases/Sesion 04 - Retroalimentación ACA1 · Antecedentes de investigación/Presentacion.pptx
@@ -3361,41 +3361,6 @@
                 <a:latin typeface="Calibri"/>
               </a:rPr>
               <a:t> PROYECTO I</a:t>
-            </a:r>
-          </a:p>
-        </p:txBody>
-      </p:sp>
-      <p:sp>
-        <p:nvSpPr>
-          <p:cNvPr id="7" name="TextBox 6"/>
-          <p:cNvSpPr txBox="1"/>
-          <p:nvPr/>
-        </p:nvSpPr>
-        <p:spPr>
-          <a:xfrm>
-            <a:off x="2194560" y="6446520"/>
-            <a:ext cx="5943600" cy="274320"/>
-          </a:xfrm>
-          <a:prstGeom prst="rect">
-            <a:avLst/>
-          </a:prstGeom>
-          <a:noFill/>
-        </p:spPr>
-        <p:txBody>
-          <a:bodyPr wrap="square" anchor="t" lIns="0" rIns="0" tIns="0" bIns="0">
-            <a:spAutoFit/>
-          </a:bodyPr>
-          <a:lstStyle/>
-          <a:p>
-            <a:pPr algn="l"/>
-            <a:r>
-              <a:rPr sz="1000" b="1" i="0">
-                <a:solidFill>
-                  <a:srgbClr val="8F989D"/>
-                </a:solidFill>
-                <a:latin typeface="Calibri"/>
-              </a:rPr>
-              <a:t>Inicio 8:10 pm</a:t>
             </a:r>
           </a:p>
         </p:txBody>
@@ -4018,41 +3983,6 @@
         </p:nvSpPr>
         <p:spPr>
           <a:xfrm>
-            <a:off x="2194560" y="6446520"/>
-            <a:ext cx="5943600" cy="274320"/>
-          </a:xfrm>
-          <a:prstGeom prst="rect">
-            <a:avLst/>
-          </a:prstGeom>
-          <a:noFill/>
-        </p:spPr>
-        <p:txBody>
-          <a:bodyPr wrap="square" anchor="t" lIns="0" rIns="0" tIns="0" bIns="0">
-            <a:spAutoFit/>
-          </a:bodyPr>
-          <a:lstStyle/>
-          <a:p>
-            <a:pPr algn="l"/>
-            <a:r>
-              <a:rPr sz="1000" b="1" i="0">
-                <a:solidFill>
-                  <a:srgbClr val="8F989D"/>
-                </a:solidFill>
-                <a:latin typeface="Calibri"/>
-              </a:rPr>
-              <a:t>Inicio 8:10 pm</a:t>
-            </a:r>
-          </a:p>
-        </p:txBody>
-      </p:sp>
-      <p:sp>
-        <p:nvSpPr>
-          <p:cNvPr id="7" name="TextBox 6"/>
-          <p:cNvSpPr txBox="1"/>
-          <p:nvPr/>
-        </p:nvSpPr>
-        <p:spPr>
-          <a:xfrm>
             <a:off x="11094415" y="6446520"/>
             <a:ext cx="548640" cy="274320"/>
           </a:xfrm>
@@ -4490,41 +4420,6 @@
         </p:nvSpPr>
         <p:spPr>
           <a:xfrm>
-            <a:off x="2194560" y="6446520"/>
-            <a:ext cx="5943600" cy="274320"/>
-          </a:xfrm>
-          <a:prstGeom prst="rect">
-            <a:avLst/>
-          </a:prstGeom>
-          <a:noFill/>
-        </p:spPr>
-        <p:txBody>
-          <a:bodyPr wrap="square" anchor="t" lIns="0" rIns="0" tIns="0" bIns="0">
-            <a:spAutoFit/>
-          </a:bodyPr>
-          <a:lstStyle/>
-          <a:p>
-            <a:pPr algn="l"/>
-            <a:r>
-              <a:rPr sz="1000" b="1" i="0">
-                <a:solidFill>
-                  <a:srgbClr val="8F989D"/>
-                </a:solidFill>
-                <a:latin typeface="Calibri"/>
-              </a:rPr>
-              <a:t>Inicio 8:10 pm</a:t>
-            </a:r>
-          </a:p>
-        </p:txBody>
-      </p:sp>
-      <p:sp>
-        <p:nvSpPr>
-          <p:cNvPr id="6" name="TextBox 5"/>
-          <p:cNvSpPr txBox="1"/>
-          <p:nvPr/>
-        </p:nvSpPr>
-        <p:spPr>
-          <a:xfrm>
             <a:off x="11094415" y="6446520"/>
             <a:ext cx="548640" cy="274320"/>
           </a:xfrm>
@@ -4554,7 +4449,7 @@
       </p:sp>
       <p:sp>
         <p:nvSpPr>
-          <p:cNvPr id="7" name="TextBox 6"/>
+          <p:cNvPr id="6" name="TextBox 5"/>
           <p:cNvSpPr txBox="1"/>
           <p:nvPr/>
         </p:nvSpPr>
@@ -5008,41 +4903,6 @@
         </p:nvSpPr>
         <p:spPr>
           <a:xfrm>
-            <a:off x="2194560" y="6446520"/>
-            <a:ext cx="5943600" cy="274320"/>
-          </a:xfrm>
-          <a:prstGeom prst="rect">
-            <a:avLst/>
-          </a:prstGeom>
-          <a:noFill/>
-        </p:spPr>
-        <p:txBody>
-          <a:bodyPr wrap="square" anchor="t" lIns="0" rIns="0" tIns="0" bIns="0">
-            <a:spAutoFit/>
-          </a:bodyPr>
-          <a:lstStyle/>
-          <a:p>
-            <a:pPr algn="l"/>
-            <a:r>
-              <a:rPr sz="1000" b="1" i="0">
-                <a:solidFill>
-                  <a:srgbClr val="8F989D"/>
-                </a:solidFill>
-                <a:latin typeface="Calibri"/>
-              </a:rPr>
-              <a:t>Inicio 8:10 pm</a:t>
-            </a:r>
-          </a:p>
-        </p:txBody>
-      </p:sp>
-      <p:sp>
-        <p:nvSpPr>
-          <p:cNvPr id="11" name="TextBox 10"/>
-          <p:cNvSpPr txBox="1"/>
-          <p:nvPr/>
-        </p:nvSpPr>
-        <p:spPr>
-          <a:xfrm>
             <a:off x="11094415" y="6446520"/>
             <a:ext cx="548640" cy="274320"/>
           </a:xfrm>
@@ -5286,41 +5146,6 @@
         </p:nvSpPr>
         <p:spPr>
           <a:xfrm>
-            <a:off x="2194560" y="6446520"/>
-            <a:ext cx="5943600" cy="274320"/>
-          </a:xfrm>
-          <a:prstGeom prst="rect">
-            <a:avLst/>
-          </a:prstGeom>
-          <a:noFill/>
-        </p:spPr>
-        <p:txBody>
-          <a:bodyPr wrap="square" anchor="t" lIns="0" rIns="0" tIns="0" bIns="0">
-            <a:spAutoFit/>
-          </a:bodyPr>
-          <a:lstStyle/>
-          <a:p>
-            <a:pPr algn="l"/>
-            <a:r>
-              <a:rPr sz="1000" b="1" i="0">
-                <a:solidFill>
-                  <a:srgbClr val="8F989D"/>
-                </a:solidFill>
-                <a:latin typeface="Calibri"/>
-              </a:rPr>
-              <a:t>Inicio 8:10 pm</a:t>
-            </a:r>
-          </a:p>
-        </p:txBody>
-      </p:sp>
-      <p:sp>
-        <p:nvSpPr>
-          <p:cNvPr id="7" name="TextBox 6"/>
-          <p:cNvSpPr txBox="1"/>
-          <p:nvPr/>
-        </p:nvSpPr>
-        <p:spPr>
-          <a:xfrm>
             <a:off x="11094415" y="6446520"/>
             <a:ext cx="548640" cy="274320"/>
           </a:xfrm>
@@ -5864,41 +5689,6 @@
         </p:nvSpPr>
         <p:spPr>
           <a:xfrm>
-            <a:off x="2194560" y="6446520"/>
-            <a:ext cx="5943600" cy="274320"/>
-          </a:xfrm>
-          <a:prstGeom prst="rect">
-            <a:avLst/>
-          </a:prstGeom>
-          <a:noFill/>
-        </p:spPr>
-        <p:txBody>
-          <a:bodyPr wrap="square" anchor="t" lIns="0" rIns="0" tIns="0" bIns="0">
-            <a:spAutoFit/>
-          </a:bodyPr>
-          <a:lstStyle/>
-          <a:p>
-            <a:pPr algn="l"/>
-            <a:r>
-              <a:rPr sz="1000" b="1" i="0">
-                <a:solidFill>
-                  <a:srgbClr val="8F989D"/>
-                </a:solidFill>
-                <a:latin typeface="Calibri"/>
-              </a:rPr>
-              <a:t>Inicio 8:10 pm</a:t>
-            </a:r>
-          </a:p>
-        </p:txBody>
-      </p:sp>
-      <p:sp>
-        <p:nvSpPr>
-          <p:cNvPr id="6" name="TextBox 5"/>
-          <p:cNvSpPr txBox="1"/>
-          <p:nvPr/>
-        </p:nvSpPr>
-        <p:spPr>
-          <a:xfrm>
             <a:off x="11094415" y="6446520"/>
             <a:ext cx="548640" cy="274320"/>
           </a:xfrm>
@@ -5928,7 +5718,7 @@
       </p:sp>
       <p:sp>
         <p:nvSpPr>
-          <p:cNvPr id="7" name="TextBox 6"/>
+          <p:cNvPr id="6" name="TextBox 5"/>
           <p:cNvSpPr txBox="1"/>
           <p:nvPr/>
         </p:nvSpPr>
@@ -6422,41 +6212,6 @@
         </p:nvSpPr>
         <p:spPr>
           <a:xfrm>
-            <a:off x="2194560" y="6446520"/>
-            <a:ext cx="5943600" cy="274320"/>
-          </a:xfrm>
-          <a:prstGeom prst="rect">
-            <a:avLst/>
-          </a:prstGeom>
-          <a:noFill/>
-        </p:spPr>
-        <p:txBody>
-          <a:bodyPr wrap="square" anchor="t" lIns="0" rIns="0" tIns="0" bIns="0">
-            <a:spAutoFit/>
-          </a:bodyPr>
-          <a:lstStyle/>
-          <a:p>
-            <a:pPr algn="l"/>
-            <a:r>
-              <a:rPr sz="1000" b="1" i="0">
-                <a:solidFill>
-                  <a:srgbClr val="8F989D"/>
-                </a:solidFill>
-                <a:latin typeface="Calibri"/>
-              </a:rPr>
-              <a:t>Inicio 8:10 pm</a:t>
-            </a:r>
-          </a:p>
-        </p:txBody>
-      </p:sp>
-      <p:sp>
-        <p:nvSpPr>
-          <p:cNvPr id="6" name="TextBox 5"/>
-          <p:cNvSpPr txBox="1"/>
-          <p:nvPr/>
-        </p:nvSpPr>
-        <p:spPr>
-          <a:xfrm>
             <a:off x="11094415" y="6446520"/>
             <a:ext cx="548640" cy="274320"/>
           </a:xfrm>
@@ -6486,7 +6241,7 @@
       </p:sp>
       <p:sp>
         <p:nvSpPr>
-          <p:cNvPr id="7" name="TextBox 6"/>
+          <p:cNvPr id="6" name="TextBox 5"/>
           <p:cNvSpPr txBox="1"/>
           <p:nvPr/>
         </p:nvSpPr>
@@ -7331,41 +7086,6 @@
         </p:nvSpPr>
         <p:spPr>
           <a:xfrm>
-            <a:off x="2194560" y="6446520"/>
-            <a:ext cx="5943600" cy="274320"/>
-          </a:xfrm>
-          <a:prstGeom prst="rect">
-            <a:avLst/>
-          </a:prstGeom>
-          <a:noFill/>
-        </p:spPr>
-        <p:txBody>
-          <a:bodyPr wrap="square" anchor="t" lIns="0" rIns="0" tIns="0" bIns="0">
-            <a:spAutoFit/>
-          </a:bodyPr>
-          <a:lstStyle/>
-          <a:p>
-            <a:pPr algn="l"/>
-            <a:r>
-              <a:rPr sz="1000" b="1" i="0">
-                <a:solidFill>
-                  <a:srgbClr val="8F989D"/>
-                </a:solidFill>
-                <a:latin typeface="Calibri"/>
-              </a:rPr>
-              <a:t>Inicio 8:10 pm</a:t>
-            </a:r>
-          </a:p>
-        </p:txBody>
-      </p:sp>
-      <p:sp>
-        <p:nvSpPr>
-          <p:cNvPr id="7" name="TextBox 6"/>
-          <p:cNvSpPr txBox="1"/>
-          <p:nvPr/>
-        </p:nvSpPr>
-        <p:spPr>
-          <a:xfrm>
             <a:off x="11094415" y="6446520"/>
             <a:ext cx="548640" cy="274320"/>
           </a:xfrm>
@@ -7801,41 +7521,6 @@
         </p:nvSpPr>
         <p:spPr>
           <a:xfrm>
-            <a:off x="2194560" y="6446520"/>
-            <a:ext cx="5943600" cy="274320"/>
-          </a:xfrm>
-          <a:prstGeom prst="rect">
-            <a:avLst/>
-          </a:prstGeom>
-          <a:noFill/>
-        </p:spPr>
-        <p:txBody>
-          <a:bodyPr wrap="square" anchor="t" lIns="0" rIns="0" tIns="0" bIns="0">
-            <a:spAutoFit/>
-          </a:bodyPr>
-          <a:lstStyle/>
-          <a:p>
-            <a:pPr algn="l"/>
-            <a:r>
-              <a:rPr sz="1000" b="1" i="0">
-                <a:solidFill>
-                  <a:srgbClr val="8F989D"/>
-                </a:solidFill>
-                <a:latin typeface="Calibri"/>
-              </a:rPr>
-              <a:t>Inicio 8:10 pm</a:t>
-            </a:r>
-          </a:p>
-        </p:txBody>
-      </p:sp>
-      <p:sp>
-        <p:nvSpPr>
-          <p:cNvPr id="6" name="TextBox 5"/>
-          <p:cNvSpPr txBox="1"/>
-          <p:nvPr/>
-        </p:nvSpPr>
-        <p:spPr>
-          <a:xfrm>
             <a:off x="11094415" y="6446520"/>
             <a:ext cx="548640" cy="274320"/>
           </a:xfrm>
@@ -7865,7 +7550,7 @@
       </p:sp>
       <p:sp>
         <p:nvSpPr>
-          <p:cNvPr id="7" name="TextBox 6"/>
+          <p:cNvPr id="6" name="TextBox 5"/>
           <p:cNvSpPr txBox="1"/>
           <p:nvPr/>
         </p:nvSpPr>
@@ -8116,41 +7801,6 @@
           </a:p>
         </p:txBody>
       </p:sp>
-      <p:sp>
-        <p:nvSpPr>
-          <p:cNvPr id="7" name="TextBox 6"/>
-          <p:cNvSpPr txBox="1"/>
-          <p:nvPr/>
-        </p:nvSpPr>
-        <p:spPr>
-          <a:xfrm>
-            <a:off x="2194560" y="6446520"/>
-            <a:ext cx="5943600" cy="274320"/>
-          </a:xfrm>
-          <a:prstGeom prst="rect">
-            <a:avLst/>
-          </a:prstGeom>
-          <a:noFill/>
-        </p:spPr>
-        <p:txBody>
-          <a:bodyPr wrap="square" anchor="t" lIns="0" rIns="0" tIns="0" bIns="0">
-            <a:spAutoFit/>
-          </a:bodyPr>
-          <a:lstStyle/>
-          <a:p>
-            <a:pPr algn="l"/>
-            <a:r>
-              <a:rPr sz="1000" b="1" i="0">
-                <a:solidFill>
-                  <a:srgbClr val="8F989D"/>
-                </a:solidFill>
-                <a:latin typeface="Calibri"/>
-              </a:rPr>
-              <a:t>Inicio 8:10 pm</a:t>
-            </a:r>
-          </a:p>
-        </p:txBody>
-      </p:sp>
     </p:spTree>
   </p:cSld>
   <p:clrMapOvr>
@@ -8453,41 +8103,6 @@
         </p:nvSpPr>
         <p:spPr>
           <a:xfrm>
-            <a:off x="2194560" y="6446520"/>
-            <a:ext cx="5943600" cy="274320"/>
-          </a:xfrm>
-          <a:prstGeom prst="rect">
-            <a:avLst/>
-          </a:prstGeom>
-          <a:noFill/>
-        </p:spPr>
-        <p:txBody>
-          <a:bodyPr wrap="square" anchor="t" lIns="0" rIns="0" tIns="0" bIns="0">
-            <a:spAutoFit/>
-          </a:bodyPr>
-          <a:lstStyle/>
-          <a:p>
-            <a:pPr algn="l"/>
-            <a:r>
-              <a:rPr sz="1000" b="1" i="0">
-                <a:solidFill>
-                  <a:srgbClr val="8F989D"/>
-                </a:solidFill>
-                <a:latin typeface="Calibri"/>
-              </a:rPr>
-              <a:t>Inicio 8:10 pm</a:t>
-            </a:r>
-          </a:p>
-        </p:txBody>
-      </p:sp>
-      <p:sp>
-        <p:nvSpPr>
-          <p:cNvPr id="6" name="TextBox 5"/>
-          <p:cNvSpPr txBox="1"/>
-          <p:nvPr/>
-        </p:nvSpPr>
-        <p:spPr>
-          <a:xfrm>
             <a:off x="11094415" y="6446520"/>
             <a:ext cx="548640" cy="274320"/>
           </a:xfrm>
@@ -8517,7 +8132,7 @@
       </p:sp>
       <p:sp>
         <p:nvSpPr>
-          <p:cNvPr id="7" name="TextBox 6"/>
+          <p:cNvPr id="6" name="TextBox 5"/>
           <p:cNvSpPr txBox="1"/>
           <p:nvPr/>
         </p:nvSpPr>
@@ -8903,41 +8518,6 @@
         </p:nvSpPr>
         <p:spPr>
           <a:xfrm>
-            <a:off x="2194560" y="6446520"/>
-            <a:ext cx="5943600" cy="274320"/>
-          </a:xfrm>
-          <a:prstGeom prst="rect">
-            <a:avLst/>
-          </a:prstGeom>
-          <a:noFill/>
-        </p:spPr>
-        <p:txBody>
-          <a:bodyPr wrap="square" anchor="t" lIns="0" rIns="0" tIns="0" bIns="0">
-            <a:spAutoFit/>
-          </a:bodyPr>
-          <a:lstStyle/>
-          <a:p>
-            <a:pPr algn="l"/>
-            <a:r>
-              <a:rPr sz="1000" b="1" i="0">
-                <a:solidFill>
-                  <a:srgbClr val="8F989D"/>
-                </a:solidFill>
-                <a:latin typeface="Calibri"/>
-              </a:rPr>
-              <a:t>Inicio 8:10 pm</a:t>
-            </a:r>
-          </a:p>
-        </p:txBody>
-      </p:sp>
-      <p:sp>
-        <p:nvSpPr>
-          <p:cNvPr id="6" name="TextBox 5"/>
-          <p:cNvSpPr txBox="1"/>
-          <p:nvPr/>
-        </p:nvSpPr>
-        <p:spPr>
-          <a:xfrm>
             <a:off x="11094415" y="6446520"/>
             <a:ext cx="548640" cy="274320"/>
           </a:xfrm>
@@ -8967,7 +8547,7 @@
       </p:sp>
       <p:sp>
         <p:nvSpPr>
-          <p:cNvPr id="7" name="TextBox 6"/>
+          <p:cNvPr id="6" name="TextBox 5"/>
           <p:cNvSpPr txBox="1"/>
           <p:nvPr/>
         </p:nvSpPr>
@@ -9670,41 +9250,6 @@
         </p:nvSpPr>
         <p:spPr>
           <a:xfrm>
-            <a:off x="2194560" y="6446520"/>
-            <a:ext cx="5943600" cy="274320"/>
-          </a:xfrm>
-          <a:prstGeom prst="rect">
-            <a:avLst/>
-          </a:prstGeom>
-          <a:noFill/>
-        </p:spPr>
-        <p:txBody>
-          <a:bodyPr wrap="square" anchor="t" lIns="0" rIns="0" tIns="0" bIns="0">
-            <a:spAutoFit/>
-          </a:bodyPr>
-          <a:lstStyle/>
-          <a:p>
-            <a:pPr algn="l"/>
-            <a:r>
-              <a:rPr sz="1000" b="1" i="0">
-                <a:solidFill>
-                  <a:srgbClr val="8F989D"/>
-                </a:solidFill>
-                <a:latin typeface="Calibri"/>
-              </a:rPr>
-              <a:t>Inicio 8:10 pm</a:t>
-            </a:r>
-          </a:p>
-        </p:txBody>
-      </p:sp>
-      <p:sp>
-        <p:nvSpPr>
-          <p:cNvPr id="7" name="TextBox 6"/>
-          <p:cNvSpPr txBox="1"/>
-          <p:nvPr/>
-        </p:nvSpPr>
-        <p:spPr>
-          <a:xfrm>
             <a:off x="11094415" y="6446520"/>
             <a:ext cx="548640" cy="274320"/>
           </a:xfrm>
@@ -10212,41 +9757,6 @@
         </p:nvSpPr>
         <p:spPr>
           <a:xfrm>
-            <a:off x="2194560" y="6446520"/>
-            <a:ext cx="5943600" cy="274320"/>
-          </a:xfrm>
-          <a:prstGeom prst="rect">
-            <a:avLst/>
-          </a:prstGeom>
-          <a:noFill/>
-        </p:spPr>
-        <p:txBody>
-          <a:bodyPr wrap="square" anchor="t" lIns="0" rIns="0" tIns="0" bIns="0">
-            <a:spAutoFit/>
-          </a:bodyPr>
-          <a:lstStyle/>
-          <a:p>
-            <a:pPr algn="l"/>
-            <a:r>
-              <a:rPr sz="1000" b="1" i="0">
-                <a:solidFill>
-                  <a:srgbClr val="8F989D"/>
-                </a:solidFill>
-                <a:latin typeface="Calibri"/>
-              </a:rPr>
-              <a:t>Inicio 8:10 pm</a:t>
-            </a:r>
-          </a:p>
-        </p:txBody>
-      </p:sp>
-      <p:sp>
-        <p:nvSpPr>
-          <p:cNvPr id="6" name="TextBox 5"/>
-          <p:cNvSpPr txBox="1"/>
-          <p:nvPr/>
-        </p:nvSpPr>
-        <p:spPr>
-          <a:xfrm>
             <a:off x="11094415" y="6446520"/>
             <a:ext cx="548640" cy="274320"/>
           </a:xfrm>
@@ -10276,7 +9786,7 @@
       </p:sp>
       <p:sp>
         <p:nvSpPr>
-          <p:cNvPr id="7" name="TextBox 6"/>
+          <p:cNvPr id="6" name="TextBox 5"/>
           <p:cNvSpPr txBox="1"/>
           <p:nvPr/>
         </p:nvSpPr>
@@ -11139,41 +10649,6 @@
         </p:nvSpPr>
         <p:spPr>
           <a:xfrm>
-            <a:off x="2194560" y="6446520"/>
-            <a:ext cx="5943600" cy="274320"/>
-          </a:xfrm>
-          <a:prstGeom prst="rect">
-            <a:avLst/>
-          </a:prstGeom>
-          <a:noFill/>
-        </p:spPr>
-        <p:txBody>
-          <a:bodyPr wrap="square" anchor="t" lIns="0" rIns="0" tIns="0" bIns="0">
-            <a:spAutoFit/>
-          </a:bodyPr>
-          <a:lstStyle/>
-          <a:p>
-            <a:pPr algn="l"/>
-            <a:r>
-              <a:rPr sz="1000" b="1" i="0">
-                <a:solidFill>
-                  <a:srgbClr val="8F989D"/>
-                </a:solidFill>
-                <a:latin typeface="Calibri"/>
-              </a:rPr>
-              <a:t>Inicio 8:10 pm</a:t>
-            </a:r>
-          </a:p>
-        </p:txBody>
-      </p:sp>
-      <p:sp>
-        <p:nvSpPr>
-          <p:cNvPr id="7" name="TextBox 6"/>
-          <p:cNvSpPr txBox="1"/>
-          <p:nvPr/>
-        </p:nvSpPr>
-        <p:spPr>
-          <a:xfrm>
             <a:off x="11094415" y="6446520"/>
             <a:ext cx="548640" cy="274320"/>
           </a:xfrm>
@@ -11846,41 +11321,6 @@
         </p:nvSpPr>
         <p:spPr>
           <a:xfrm>
-            <a:off x="2194560" y="6446520"/>
-            <a:ext cx="5943600" cy="274320"/>
-          </a:xfrm>
-          <a:prstGeom prst="rect">
-            <a:avLst/>
-          </a:prstGeom>
-          <a:noFill/>
-        </p:spPr>
-        <p:txBody>
-          <a:bodyPr wrap="square" anchor="t" lIns="0" rIns="0" tIns="0" bIns="0">
-            <a:spAutoFit/>
-          </a:bodyPr>
-          <a:lstStyle/>
-          <a:p>
-            <a:pPr algn="l"/>
-            <a:r>
-              <a:rPr sz="1000" b="1" i="0">
-                <a:solidFill>
-                  <a:srgbClr val="8F989D"/>
-                </a:solidFill>
-                <a:latin typeface="Calibri"/>
-              </a:rPr>
-              <a:t>Inicio 8:10 pm</a:t>
-            </a:r>
-          </a:p>
-        </p:txBody>
-      </p:sp>
-      <p:sp>
-        <p:nvSpPr>
-          <p:cNvPr id="7" name="TextBox 6"/>
-          <p:cNvSpPr txBox="1"/>
-          <p:nvPr/>
-        </p:nvSpPr>
-        <p:spPr>
-          <a:xfrm>
             <a:off x="11094415" y="6446520"/>
             <a:ext cx="548640" cy="274320"/>
           </a:xfrm>
@@ -12246,41 +11686,6 @@
         </p:nvSpPr>
         <p:spPr>
           <a:xfrm>
-            <a:off x="2194560" y="6446520"/>
-            <a:ext cx="5943600" cy="274320"/>
-          </a:xfrm>
-          <a:prstGeom prst="rect">
-            <a:avLst/>
-          </a:prstGeom>
-          <a:noFill/>
-        </p:spPr>
-        <p:txBody>
-          <a:bodyPr wrap="square" anchor="t" lIns="0" rIns="0" tIns="0" bIns="0">
-            <a:spAutoFit/>
-          </a:bodyPr>
-          <a:lstStyle/>
-          <a:p>
-            <a:pPr algn="l"/>
-            <a:r>
-              <a:rPr sz="1000" b="1" i="0">
-                <a:solidFill>
-                  <a:srgbClr val="8F989D"/>
-                </a:solidFill>
-                <a:latin typeface="Calibri"/>
-              </a:rPr>
-              <a:t>Inicio 8:10 pm</a:t>
-            </a:r>
-          </a:p>
-        </p:txBody>
-      </p:sp>
-      <p:sp>
-        <p:nvSpPr>
-          <p:cNvPr id="6" name="TextBox 5"/>
-          <p:cNvSpPr txBox="1"/>
-          <p:nvPr/>
-        </p:nvSpPr>
-        <p:spPr>
-          <a:xfrm>
             <a:off x="11094415" y="6446520"/>
             <a:ext cx="548640" cy="274320"/>
           </a:xfrm>
@@ -12310,7 +11715,7 @@
       </p:sp>
       <p:sp>
         <p:nvSpPr>
-          <p:cNvPr id="7" name="TextBox 6"/>
+          <p:cNvPr id="6" name="TextBox 5"/>
           <p:cNvSpPr txBox="1"/>
           <p:nvPr/>
         </p:nvSpPr>
@@ -12824,41 +12229,6 @@
         </p:nvSpPr>
         <p:spPr>
           <a:xfrm>
-            <a:off x="2194560" y="6446520"/>
-            <a:ext cx="5943600" cy="274320"/>
-          </a:xfrm>
-          <a:prstGeom prst="rect">
-            <a:avLst/>
-          </a:prstGeom>
-          <a:noFill/>
-        </p:spPr>
-        <p:txBody>
-          <a:bodyPr wrap="square" anchor="t" lIns="0" rIns="0" tIns="0" bIns="0">
-            <a:spAutoFit/>
-          </a:bodyPr>
-          <a:lstStyle/>
-          <a:p>
-            <a:pPr algn="l"/>
-            <a:r>
-              <a:rPr sz="1000" b="1" i="0">
-                <a:solidFill>
-                  <a:srgbClr val="8F989D"/>
-                </a:solidFill>
-                <a:latin typeface="Calibri"/>
-              </a:rPr>
-              <a:t>Inicio 8:10 pm</a:t>
-            </a:r>
-          </a:p>
-        </p:txBody>
-      </p:sp>
-      <p:sp>
-        <p:nvSpPr>
-          <p:cNvPr id="6" name="TextBox 5"/>
-          <p:cNvSpPr txBox="1"/>
-          <p:nvPr/>
-        </p:nvSpPr>
-        <p:spPr>
-          <a:xfrm>
             <a:off x="11094415" y="6446520"/>
             <a:ext cx="548640" cy="274320"/>
           </a:xfrm>
@@ -12888,7 +12258,7 @@
       </p:sp>
       <p:sp>
         <p:nvSpPr>
-          <p:cNvPr id="7" name="TextBox 6"/>
+          <p:cNvPr id="6" name="TextBox 5"/>
           <p:cNvSpPr txBox="1"/>
           <p:nvPr/>
         </p:nvSpPr>
